--- a/Uso delle correlazioni temporali nella tecnica ISM 2.pptx
+++ b/Uso delle correlazioni temporali nella tecnica ISM 2.pptx
@@ -5505,7 +5505,7 @@
       </p:pic>
       <p:pic>
         <p:nvPicPr>
-          <p:cNvPr id="31" name="Picture 30" descr="A close-up of a microscope&#10;&#10;AI-generated content may be incorrect.">
+          <p:cNvPr id="31" name="Picture 30">
             <a:extLst>
               <a:ext uri="{FF2B5EF4-FFF2-40B4-BE49-F238E27FC236}">
                 <a16:creationId xmlns:a16="http://schemas.microsoft.com/office/drawing/2014/main" id="{37739295-38F5-A145-4867-CC08C3843D12}"/>
@@ -5525,14 +5525,13 @@
               </a:ext>
             </a:extLst>
           </a:blip>
-          <a:stretch>
-            <a:fillRect/>
-          </a:stretch>
+          <a:srcRect/>
+          <a:stretch/>
         </p:blipFill>
         <p:spPr>
           <a:xfrm>
-            <a:off x="960773" y="4561475"/>
-            <a:ext cx="2291301" cy="2160000"/>
+            <a:off x="960773" y="4562400"/>
+            <a:ext cx="2291301" cy="2158150"/>
           </a:xfrm>
           <a:prstGeom prst="rect">
             <a:avLst/>
@@ -5541,7 +5540,7 @@
       </p:pic>
       <p:pic>
         <p:nvPicPr>
-          <p:cNvPr id="33" name="Picture 32" descr="A close-up of a red and yellow square&#10;&#10;AI-generated content may be incorrect.">
+          <p:cNvPr id="33" name="Picture 32">
             <a:extLst>
               <a:ext uri="{FF2B5EF4-FFF2-40B4-BE49-F238E27FC236}">
                 <a16:creationId xmlns:a16="http://schemas.microsoft.com/office/drawing/2014/main" id="{DF191F74-8EF6-EB94-E34B-2B0E6D43B01A}"/>
@@ -5561,14 +5560,13 @@
               </a:ext>
             </a:extLst>
           </a:blip>
-          <a:stretch>
-            <a:fillRect/>
-          </a:stretch>
+          <a:srcRect/>
+          <a:stretch/>
         </p:blipFill>
         <p:spPr>
           <a:xfrm>
-            <a:off x="3748950" y="4603323"/>
-            <a:ext cx="2291301" cy="2160000"/>
+            <a:off x="3748950" y="4604248"/>
+            <a:ext cx="2291301" cy="2158150"/>
           </a:xfrm>
           <a:prstGeom prst="rect">
             <a:avLst/>
@@ -5577,7 +5575,7 @@
       </p:pic>
       <p:pic>
         <p:nvPicPr>
-          <p:cNvPr id="35" name="Picture 34" descr="A red and yellow squares&#10;&#10;AI-generated content may be incorrect.">
+          <p:cNvPr id="35" name="Picture 34">
             <a:extLst>
               <a:ext uri="{FF2B5EF4-FFF2-40B4-BE49-F238E27FC236}">
                 <a16:creationId xmlns:a16="http://schemas.microsoft.com/office/drawing/2014/main" id="{138786A0-F3E9-94D6-533F-401623720452}"/>
@@ -5597,14 +5595,13 @@
               </a:ext>
             </a:extLst>
           </a:blip>
-          <a:stretch>
-            <a:fillRect/>
-          </a:stretch>
+          <a:srcRect/>
+          <a:stretch/>
         </p:blipFill>
         <p:spPr>
           <a:xfrm>
-            <a:off x="6537129" y="4545134"/>
-            <a:ext cx="2291301" cy="2160000"/>
+            <a:off x="6537129" y="4546059"/>
+            <a:ext cx="2291301" cy="2158150"/>
           </a:xfrm>
           <a:prstGeom prst="rect">
             <a:avLst/>
@@ -5613,7 +5610,7 @@
       </p:pic>
       <p:pic>
         <p:nvPicPr>
-          <p:cNvPr id="37" name="Picture 36" descr="A red square with yellow dots&#10;&#10;AI-generated content may be incorrect.">
+          <p:cNvPr id="37" name="Picture 36">
             <a:extLst>
               <a:ext uri="{FF2B5EF4-FFF2-40B4-BE49-F238E27FC236}">
                 <a16:creationId xmlns:a16="http://schemas.microsoft.com/office/drawing/2014/main" id="{CD67C29B-544B-99F6-02F0-949BA152CFB9}"/>
@@ -5633,14 +5630,13 @@
               </a:ext>
             </a:extLst>
           </a:blip>
-          <a:stretch>
-            <a:fillRect/>
-          </a:stretch>
+          <a:srcRect/>
+          <a:stretch/>
         </p:blipFill>
         <p:spPr>
           <a:xfrm>
-            <a:off x="9325306" y="4536961"/>
-            <a:ext cx="2291301" cy="2160000"/>
+            <a:off x="9325306" y="4537886"/>
+            <a:ext cx="2291301" cy="2158150"/>
           </a:xfrm>
           <a:prstGeom prst="rect">
             <a:avLst/>
@@ -5649,7 +5645,7 @@
       </p:pic>
       <p:pic>
         <p:nvPicPr>
-          <p:cNvPr id="39" name="Picture 38" descr="A close-up of a microscope&#10;&#10;AI-generated content may be incorrect.">
+          <p:cNvPr id="39" name="Picture 38">
             <a:extLst>
               <a:ext uri="{FF2B5EF4-FFF2-40B4-BE49-F238E27FC236}">
                 <a16:creationId xmlns:a16="http://schemas.microsoft.com/office/drawing/2014/main" id="{501DE003-45C7-FF2E-0A53-223D27B5A746}"/>
@@ -5669,14 +5665,13 @@
               </a:ext>
             </a:extLst>
           </a:blip>
-          <a:stretch>
-            <a:fillRect/>
-          </a:stretch>
+          <a:srcRect/>
+          <a:stretch/>
         </p:blipFill>
         <p:spPr>
           <a:xfrm>
-            <a:off x="960774" y="152867"/>
-            <a:ext cx="2291301" cy="2160000"/>
+            <a:off x="960774" y="153792"/>
+            <a:ext cx="2291301" cy="2158150"/>
           </a:xfrm>
           <a:prstGeom prst="rect">
             <a:avLst/>
@@ -5685,7 +5680,7 @@
       </p:pic>
       <p:pic>
         <p:nvPicPr>
-          <p:cNvPr id="41" name="Picture 40" descr="A close-up of a red and black background&#10;&#10;AI-generated content may be incorrect.">
+          <p:cNvPr id="41" name="Picture 40">
             <a:extLst>
               <a:ext uri="{FF2B5EF4-FFF2-40B4-BE49-F238E27FC236}">
                 <a16:creationId xmlns:a16="http://schemas.microsoft.com/office/drawing/2014/main" id="{963B62B0-C5AA-B060-FFDB-250C3781A3F6}"/>
@@ -5705,14 +5700,13 @@
               </a:ext>
             </a:extLst>
           </a:blip>
-          <a:stretch>
-            <a:fillRect/>
-          </a:stretch>
+          <a:srcRect/>
+          <a:stretch/>
         </p:blipFill>
         <p:spPr>
           <a:xfrm>
-            <a:off x="3748951" y="152866"/>
-            <a:ext cx="2291301" cy="2160000"/>
+            <a:off x="3748951" y="153791"/>
+            <a:ext cx="2291301" cy="2158150"/>
           </a:xfrm>
           <a:prstGeom prst="rect">
             <a:avLst/>
@@ -5721,7 +5715,7 @@
       </p:pic>
       <p:pic>
         <p:nvPicPr>
-          <p:cNvPr id="43" name="Picture 42" descr="A close-up of a red and yellow background&#10;&#10;AI-generated content may be incorrect.">
+          <p:cNvPr id="43" name="Picture 42">
             <a:extLst>
               <a:ext uri="{FF2B5EF4-FFF2-40B4-BE49-F238E27FC236}">
                 <a16:creationId xmlns:a16="http://schemas.microsoft.com/office/drawing/2014/main" id="{CA663472-7D1B-4D00-8BAE-296C3A03FB2C}"/>
@@ -5741,14 +5735,13 @@
               </a:ext>
             </a:extLst>
           </a:blip>
-          <a:stretch>
-            <a:fillRect/>
-          </a:stretch>
+          <a:srcRect/>
+          <a:stretch/>
         </p:blipFill>
         <p:spPr>
           <a:xfrm>
-            <a:off x="6537129" y="152867"/>
-            <a:ext cx="2291301" cy="2160000"/>
+            <a:off x="6537129" y="153792"/>
+            <a:ext cx="2291301" cy="2158150"/>
           </a:xfrm>
           <a:prstGeom prst="rect">
             <a:avLst/>
@@ -5891,7 +5884,7 @@
       </p:sp>
       <p:pic>
         <p:nvPicPr>
-          <p:cNvPr id="8" name="Picture 7" descr="A red and yellow image of a cell&#10;&#10;AI-generated content may be incorrect.">
+          <p:cNvPr id="8" name="Picture 7">
             <a:extLst>
               <a:ext uri="{FF2B5EF4-FFF2-40B4-BE49-F238E27FC236}">
                 <a16:creationId xmlns:a16="http://schemas.microsoft.com/office/drawing/2014/main" id="{AEC503D0-908D-687A-31B5-57DEA9EE91C7}"/>
@@ -5911,14 +5904,13 @@
               </a:ext>
             </a:extLst>
           </a:blip>
-          <a:stretch>
-            <a:fillRect/>
-          </a:stretch>
+          <a:srcRect/>
+          <a:stretch/>
         </p:blipFill>
         <p:spPr>
           <a:xfrm>
-            <a:off x="9325306" y="161039"/>
-            <a:ext cx="2291301" cy="2159999"/>
+            <a:off x="9325306" y="161963"/>
+            <a:ext cx="2291301" cy="2158150"/>
           </a:xfrm>
           <a:prstGeom prst="rect">
             <a:avLst/>
@@ -7603,8 +7595,8 @@
           </a:p>
         </p:txBody>
       </p:sp>
-      <mc:AlternateContent xmlns:mc="http://schemas.openxmlformats.org/markup-compatibility/2006">
-        <mc:Choice xmlns:a14="http://schemas.microsoft.com/office/drawing/2010/main" Requires="a14">
+      <mc:AlternateContent xmlns:mc="http://schemas.openxmlformats.org/markup-compatibility/2006" xmlns:a14="http://schemas.microsoft.com/office/drawing/2010/main">
+        <mc:Choice Requires="a14">
           <p:sp>
             <p:nvSpPr>
               <p:cNvPr id="5" name="TextBox 4">
@@ -7737,7 +7729,7 @@
             </p:txBody>
           </p:sp>
         </mc:Choice>
-        <mc:Fallback>
+        <mc:Fallback xmlns="">
           <p:sp>
             <p:nvSpPr>
               <p:cNvPr id="5" name="TextBox 4">
@@ -16255,12 +16247,6 @@
 </file>
 
 <file path=customXml/item1.xml><?xml version="1.0" encoding="utf-8"?>
-<p:properties xmlns:p="http://schemas.microsoft.com/office/2006/metadata/properties" xmlns:xsi="http://www.w3.org/2001/XMLSchema-instance" xmlns:pc="http://schemas.microsoft.com/office/infopath/2007/PartnerControls">
-  <documentManagement/>
-</p:properties>
-</file>
-
-<file path=customXml/item2.xml><?xml version="1.0" encoding="utf-8"?>
 <ct:contentTypeSchema xmlns:ct="http://schemas.microsoft.com/office/2006/metadata/contentType" xmlns:ma="http://schemas.microsoft.com/office/2006/metadata/properties/metaAttributes" ct:_="" ma:_="" ma:contentTypeName="Documento" ma:contentTypeID="0x0101003A5C4D3C86F4CA4CBDD2592D90016301" ma:contentTypeVersion="5" ma:contentTypeDescription="Creare un nuovo documento." ma:contentTypeScope="" ma:versionID="72d7096f4e80b9d0e0f99fa71fa1c65c">
   <xsd:schema xmlns:xsd="http://www.w3.org/2001/XMLSchema" xmlns:xs="http://www.w3.org/2001/XMLSchema" xmlns:p="http://schemas.microsoft.com/office/2006/metadata/properties" xmlns:ns3="d574d2c5-6ff1-4808-8760-926b2865e292" targetNamespace="http://schemas.microsoft.com/office/2006/metadata/properties" ma:root="true" ma:fieldsID="81fa706d8dd51688cd55272b4fea076e" ns3:_="">
     <xsd:import namespace="d574d2c5-6ff1-4808-8760-926b2865e292"/>
@@ -16410,6 +16396,12 @@
 </ct:contentTypeSchema>
 </file>
 
+<file path=customXml/item2.xml><?xml version="1.0" encoding="utf-8"?>
+<p:properties xmlns:p="http://schemas.microsoft.com/office/2006/metadata/properties" xmlns:xsi="http://www.w3.org/2001/XMLSchema-instance" xmlns:pc="http://schemas.microsoft.com/office/infopath/2007/PartnerControls">
+  <documentManagement/>
+</p:properties>
+</file>
+
 <file path=customXml/item3.xml><?xml version="1.0" encoding="utf-8"?>
 <?mso-contentType ?>
 <FormTemplates xmlns="http://schemas.microsoft.com/sharepoint/v3/contenttype/forms">
@@ -16420,22 +16412,6 @@
 </file>
 
 <file path=customXml/itemProps1.xml><?xml version="1.0" encoding="utf-8"?>
-<ds:datastoreItem xmlns:ds="http://schemas.openxmlformats.org/officeDocument/2006/customXml" ds:itemID="{4ECFE3AD-0855-49D4-B001-CEC94362DF12}">
-  <ds:schemaRefs>
-    <ds:schemaRef ds:uri="http://purl.org/dc/elements/1.1/"/>
-    <ds:schemaRef ds:uri="http://schemas.microsoft.com/office/infopath/2007/PartnerControls"/>
-    <ds:schemaRef ds:uri="http://www.w3.org/XML/1998/namespace"/>
-    <ds:schemaRef ds:uri="http://purl.org/dc/dcmitype/"/>
-    <ds:schemaRef ds:uri="http://purl.org/dc/terms/"/>
-    <ds:schemaRef ds:uri="http://schemas.microsoft.com/office/2006/documentManagement/types"/>
-    <ds:schemaRef ds:uri="http://schemas.openxmlformats.org/package/2006/metadata/core-properties"/>
-    <ds:schemaRef ds:uri="d574d2c5-6ff1-4808-8760-926b2865e292"/>
-    <ds:schemaRef ds:uri="http://schemas.microsoft.com/office/2006/metadata/properties"/>
-  </ds:schemaRefs>
-</ds:datastoreItem>
-</file>
-
-<file path=customXml/itemProps2.xml><?xml version="1.0" encoding="utf-8"?>
 <ds:datastoreItem xmlns:ds="http://schemas.openxmlformats.org/officeDocument/2006/customXml" ds:itemID="{707C65EB-5109-4783-BEF7-098F816442AB}">
   <ds:schemaRefs>
     <ds:schemaRef ds:uri="http://schemas.microsoft.com/office/2006/metadata/contentType"/>
@@ -16453,6 +16429,22 @@
 </ds:datastoreItem>
 </file>
 
+<file path=customXml/itemProps2.xml><?xml version="1.0" encoding="utf-8"?>
+<ds:datastoreItem xmlns:ds="http://schemas.openxmlformats.org/officeDocument/2006/customXml" ds:itemID="{4ECFE3AD-0855-49D4-B001-CEC94362DF12}">
+  <ds:schemaRefs>
+    <ds:schemaRef ds:uri="http://purl.org/dc/elements/1.1/"/>
+    <ds:schemaRef ds:uri="http://schemas.microsoft.com/office/infopath/2007/PartnerControls"/>
+    <ds:schemaRef ds:uri="http://www.w3.org/XML/1998/namespace"/>
+    <ds:schemaRef ds:uri="http://purl.org/dc/dcmitype/"/>
+    <ds:schemaRef ds:uri="http://purl.org/dc/terms/"/>
+    <ds:schemaRef ds:uri="http://schemas.microsoft.com/office/2006/documentManagement/types"/>
+    <ds:schemaRef ds:uri="http://schemas.openxmlformats.org/package/2006/metadata/core-properties"/>
+    <ds:schemaRef ds:uri="d574d2c5-6ff1-4808-8760-926b2865e292"/>
+    <ds:schemaRef ds:uri="http://schemas.microsoft.com/office/2006/metadata/properties"/>
+  </ds:schemaRefs>
+</ds:datastoreItem>
+</file>
+
 <file path=customXml/itemProps3.xml><?xml version="1.0" encoding="utf-8"?>
 <ds:datastoreItem xmlns:ds="http://schemas.openxmlformats.org/officeDocument/2006/customXml" ds:itemID="{D43ED141-44A7-4839-A6C8-810C580B75F4}">
   <ds:schemaRefs>
